--- a/docs/slides/과제배경-정정본.pptx
+++ b/docs/slides/과제배경-정정본.pptx
@@ -1342,28 +1342,42 @@
       </p:sp>
       <p:sp>
         <p:nvSpPr>
-          <p:cNvPr id="9" name="Shape 7"/>
-          <p:cNvSpPr/>
-          <p:nvPr/>
-        </p:nvSpPr>
-        <p:spPr>
-          <a:xfrm>
-            <a:off x="502920" y="1805940"/>
-            <a:ext cx="80467" cy="80467"/>
-          </a:xfrm>
-          <a:prstGeom prst="rect">
-            <a:avLst/>
-          </a:prstGeom>
-          <a:solidFill>
-            <a:srgbClr val="1F3864"/>
-          </a:solidFill>
-          <a:ln w="12700">
-            <a:solidFill>
-              <a:srgbClr val="1F3864"/>
-            </a:solidFill>
-            <a:prstDash val="solid"/>
-          </a:ln>
-        </p:spPr>
+          <p:cNvPr id="9" name="Text 7"/>
+          <p:cNvSpPr/>
+          <p:nvPr/>
+        </p:nvSpPr>
+        <p:spPr>
+          <a:xfrm>
+            <a:off x="502920" y="1728216"/>
+            <a:ext cx="5349240" cy="237744"/>
+          </a:xfrm>
+          <a:prstGeom prst="rect">
+            <a:avLst/>
+          </a:prstGeom>
+          <a:noFill/>
+          <a:ln/>
+        </p:spPr>
+        <p:txBody>
+          <a:bodyPr wrap="square" lIns="0" tIns="0" rIns="0" bIns="0" rtlCol="0" anchor="ctr"/>
+          <a:lstStyle/>
+          <a:p>
+            <a:pPr indent="0" marL="0">
+              <a:buNone/>
+            </a:pPr>
+            <a:r>
+              <a:rPr lang="en-US" sz="1250" b="1" dirty="0">
+                <a:solidFill>
+                  <a:srgbClr val="1F3864"/>
+                </a:solidFill>
+                <a:latin typeface="맑은 고딕" pitchFamily="34" charset="0"/>
+                <a:ea typeface="맑은 고딕" pitchFamily="34" charset="-122"/>
+                <a:cs typeface="맑은 고딕" pitchFamily="34" charset="-120"/>
+              </a:rPr>
+              <a:t>타인과의 일상적 조율의 높은 비용</a:t>
+            </a:r>
+            <a:endParaRPr lang="en-US" sz="1250" dirty="0"/>
+          </a:p>
+        </p:txBody>
       </p:sp>
       <p:sp>
         <p:nvSpPr>
@@ -1373,47 +1387,8 @@
         </p:nvSpPr>
         <p:spPr>
           <a:xfrm>
-            <a:off x="658368" y="1728216"/>
-            <a:ext cx="5193792" cy="237744"/>
-          </a:xfrm>
-          <a:prstGeom prst="rect">
-            <a:avLst/>
-          </a:prstGeom>
-          <a:noFill/>
-          <a:ln/>
-        </p:spPr>
-        <p:txBody>
-          <a:bodyPr wrap="square" lIns="0" tIns="0" rIns="0" bIns="0" rtlCol="0" anchor="ctr"/>
-          <a:lstStyle/>
-          <a:p>
-            <a:pPr indent="0" marL="0">
-              <a:buNone/>
-            </a:pPr>
-            <a:r>
-              <a:rPr lang="en-US" sz="1250" b="1" dirty="0">
-                <a:solidFill>
-                  <a:srgbClr val="1F3864"/>
-                </a:solidFill>
-                <a:latin typeface="맑은 고딕" pitchFamily="34" charset="0"/>
-                <a:ea typeface="맑은 고딕" pitchFamily="34" charset="-122"/>
-                <a:cs typeface="맑은 고딕" pitchFamily="34" charset="-120"/>
-              </a:rPr>
-              <a:t>타인과의 일상적 조율의 높은 비용</a:t>
-            </a:r>
-            <a:endParaRPr lang="en-US" sz="1250" dirty="0"/>
-          </a:p>
-        </p:txBody>
-      </p:sp>
-      <p:sp>
-        <p:nvSpPr>
-          <p:cNvPr id="11" name="Text 9"/>
-          <p:cNvSpPr/>
-          <p:nvPr/>
-        </p:nvSpPr>
-        <p:spPr>
-          <a:xfrm>
-            <a:off x="658368" y="2002536"/>
-            <a:ext cx="5193792" cy="914400"/>
+            <a:off x="502920" y="2002536"/>
+            <a:ext cx="5349240" cy="914400"/>
           </a:xfrm>
           <a:prstGeom prst="rect">
             <a:avLst/>
@@ -1524,39 +1499,14 @@
       </p:sp>
       <p:sp>
         <p:nvSpPr>
-          <p:cNvPr id="12" name="Shape 10"/>
-          <p:cNvSpPr/>
-          <p:nvPr/>
-        </p:nvSpPr>
-        <p:spPr>
-          <a:xfrm>
-            <a:off x="502920" y="3579876"/>
-            <a:ext cx="80467" cy="80467"/>
-          </a:xfrm>
-          <a:prstGeom prst="rect">
-            <a:avLst/>
-          </a:prstGeom>
-          <a:solidFill>
-            <a:srgbClr val="1F3864"/>
-          </a:solidFill>
-          <a:ln w="12700">
-            <a:solidFill>
-              <a:srgbClr val="1F3864"/>
-            </a:solidFill>
-            <a:prstDash val="solid"/>
-          </a:ln>
-        </p:spPr>
-      </p:sp>
-      <p:sp>
-        <p:nvSpPr>
-          <p:cNvPr id="13" name="Text 11"/>
-          <p:cNvSpPr/>
-          <p:nvPr/>
-        </p:nvSpPr>
-        <p:spPr>
-          <a:xfrm>
-            <a:off x="658368" y="3502152"/>
-            <a:ext cx="5193792" cy="237744"/>
+          <p:cNvPr id="11" name="Text 9"/>
+          <p:cNvSpPr/>
+          <p:nvPr/>
+        </p:nvSpPr>
+        <p:spPr>
+          <a:xfrm>
+            <a:off x="502920" y="3502152"/>
+            <a:ext cx="5349240" cy="237744"/>
           </a:xfrm>
           <a:prstGeom prst="rect">
             <a:avLst/>
@@ -1588,14 +1538,14 @@
       </p:sp>
       <p:sp>
         <p:nvSpPr>
-          <p:cNvPr id="14" name="Text 12"/>
-          <p:cNvSpPr/>
-          <p:nvPr/>
-        </p:nvSpPr>
-        <p:spPr>
-          <a:xfrm>
-            <a:off x="658368" y="3776472"/>
-            <a:ext cx="5193792" cy="1097280"/>
+          <p:cNvPr id="12" name="Text 10"/>
+          <p:cNvSpPr/>
+          <p:nvPr/>
+        </p:nvSpPr>
+        <p:spPr>
+          <a:xfrm>
+            <a:off x="502920" y="3776472"/>
+            <a:ext cx="5349240" cy="1097280"/>
           </a:xfrm>
           <a:prstGeom prst="rect">
             <a:avLst/>
@@ -1658,39 +1608,14 @@
       </p:sp>
       <p:sp>
         <p:nvSpPr>
-          <p:cNvPr id="15" name="Shape 13"/>
-          <p:cNvSpPr/>
-          <p:nvPr/>
-        </p:nvSpPr>
-        <p:spPr>
-          <a:xfrm>
-            <a:off x="6428232" y="1805940"/>
-            <a:ext cx="80467" cy="80467"/>
-          </a:xfrm>
-          <a:prstGeom prst="rect">
-            <a:avLst/>
-          </a:prstGeom>
-          <a:solidFill>
-            <a:srgbClr val="1F3864"/>
-          </a:solidFill>
-          <a:ln w="12700">
-            <a:solidFill>
-              <a:srgbClr val="1F3864"/>
-            </a:solidFill>
-            <a:prstDash val="solid"/>
-          </a:ln>
-        </p:spPr>
-      </p:sp>
-      <p:sp>
-        <p:nvSpPr>
-          <p:cNvPr id="16" name="Text 14"/>
-          <p:cNvSpPr/>
-          <p:nvPr/>
-        </p:nvSpPr>
-        <p:spPr>
-          <a:xfrm>
-            <a:off x="6583680" y="1728216"/>
-            <a:ext cx="5193792" cy="237744"/>
+          <p:cNvPr id="13" name="Text 11"/>
+          <p:cNvSpPr/>
+          <p:nvPr/>
+        </p:nvSpPr>
+        <p:spPr>
+          <a:xfrm>
+            <a:off x="6428232" y="1728216"/>
+            <a:ext cx="5349240" cy="237744"/>
           </a:xfrm>
           <a:prstGeom prst="rect">
             <a:avLst/>
@@ -1722,14 +1647,14 @@
       </p:sp>
       <p:sp>
         <p:nvSpPr>
-          <p:cNvPr id="17" name="Text 15"/>
-          <p:cNvSpPr/>
-          <p:nvPr/>
-        </p:nvSpPr>
-        <p:spPr>
-          <a:xfrm>
-            <a:off x="6583680" y="2002536"/>
-            <a:ext cx="5193792" cy="713232"/>
+          <p:cNvPr id="14" name="Text 12"/>
+          <p:cNvSpPr/>
+          <p:nvPr/>
+        </p:nvSpPr>
+        <p:spPr>
+          <a:xfrm>
+            <a:off x="6428232" y="2002536"/>
+            <a:ext cx="5349240" cy="713232"/>
           </a:xfrm>
           <a:prstGeom prst="rect">
             <a:avLst/>
@@ -1816,39 +1741,14 @@
       </p:sp>
       <p:sp>
         <p:nvSpPr>
-          <p:cNvPr id="18" name="Shape 16"/>
-          <p:cNvSpPr/>
-          <p:nvPr/>
-        </p:nvSpPr>
-        <p:spPr>
-          <a:xfrm>
-            <a:off x="6428232" y="3049524"/>
-            <a:ext cx="80467" cy="80467"/>
-          </a:xfrm>
-          <a:prstGeom prst="rect">
-            <a:avLst/>
-          </a:prstGeom>
-          <a:solidFill>
-            <a:srgbClr val="1F3864"/>
-          </a:solidFill>
-          <a:ln w="12700">
-            <a:solidFill>
-              <a:srgbClr val="1F3864"/>
-            </a:solidFill>
-            <a:prstDash val="solid"/>
-          </a:ln>
-        </p:spPr>
-      </p:sp>
-      <p:sp>
-        <p:nvSpPr>
-          <p:cNvPr id="19" name="Text 17"/>
-          <p:cNvSpPr/>
-          <p:nvPr/>
-        </p:nvSpPr>
-        <p:spPr>
-          <a:xfrm>
-            <a:off x="6583680" y="2971800"/>
-            <a:ext cx="5193792" cy="237744"/>
+          <p:cNvPr id="15" name="Text 13"/>
+          <p:cNvSpPr/>
+          <p:nvPr/>
+        </p:nvSpPr>
+        <p:spPr>
+          <a:xfrm>
+            <a:off x="6428232" y="2971800"/>
+            <a:ext cx="5349240" cy="237744"/>
           </a:xfrm>
           <a:prstGeom prst="rect">
             <a:avLst/>
@@ -1880,14 +1780,14 @@
       </p:sp>
       <p:sp>
         <p:nvSpPr>
-          <p:cNvPr id="20" name="Text 18"/>
-          <p:cNvSpPr/>
-          <p:nvPr/>
-        </p:nvSpPr>
-        <p:spPr>
-          <a:xfrm>
-            <a:off x="6583680" y="3246120"/>
-            <a:ext cx="5193792" cy="868680"/>
+          <p:cNvPr id="16" name="Text 14"/>
+          <p:cNvSpPr/>
+          <p:nvPr/>
+        </p:nvSpPr>
+        <p:spPr>
+          <a:xfrm>
+            <a:off x="6428232" y="3246120"/>
+            <a:ext cx="5349240" cy="868680"/>
           </a:xfrm>
           <a:prstGeom prst="rect">
             <a:avLst/>
@@ -1974,39 +1874,14 @@
       </p:sp>
       <p:sp>
         <p:nvSpPr>
-          <p:cNvPr id="21" name="Shape 19"/>
-          <p:cNvSpPr/>
-          <p:nvPr/>
-        </p:nvSpPr>
-        <p:spPr>
-          <a:xfrm>
-            <a:off x="6428232" y="4494276"/>
-            <a:ext cx="80467" cy="80467"/>
-          </a:xfrm>
-          <a:prstGeom prst="rect">
-            <a:avLst/>
-          </a:prstGeom>
-          <a:solidFill>
-            <a:srgbClr val="1F3864"/>
-          </a:solidFill>
-          <a:ln w="12700">
-            <a:solidFill>
-              <a:srgbClr val="1F3864"/>
-            </a:solidFill>
-            <a:prstDash val="solid"/>
-          </a:ln>
-        </p:spPr>
-      </p:sp>
-      <p:sp>
-        <p:nvSpPr>
-          <p:cNvPr id="22" name="Text 20"/>
-          <p:cNvSpPr/>
-          <p:nvPr/>
-        </p:nvSpPr>
-        <p:spPr>
-          <a:xfrm>
-            <a:off x="6583680" y="4416552"/>
-            <a:ext cx="5193792" cy="237744"/>
+          <p:cNvPr id="17" name="Text 15"/>
+          <p:cNvSpPr/>
+          <p:nvPr/>
+        </p:nvSpPr>
+        <p:spPr>
+          <a:xfrm>
+            <a:off x="6428232" y="4416552"/>
+            <a:ext cx="5349240" cy="237744"/>
           </a:xfrm>
           <a:prstGeom prst="rect">
             <a:avLst/>
@@ -2038,14 +1913,14 @@
       </p:sp>
       <p:sp>
         <p:nvSpPr>
-          <p:cNvPr id="23" name="Text 21"/>
-          <p:cNvSpPr/>
-          <p:nvPr/>
-        </p:nvSpPr>
-        <p:spPr>
-          <a:xfrm>
-            <a:off x="6583680" y="4690872"/>
-            <a:ext cx="5193792" cy="502920"/>
+          <p:cNvPr id="18" name="Text 16"/>
+          <p:cNvSpPr/>
+          <p:nvPr/>
+        </p:nvSpPr>
+        <p:spPr>
+          <a:xfrm>
+            <a:off x="6428232" y="4690872"/>
+            <a:ext cx="5349240" cy="502920"/>
           </a:xfrm>
           <a:prstGeom prst="rect">
             <a:avLst/>
@@ -2084,7 +1959,7 @@
       </p:sp>
       <p:sp>
         <p:nvSpPr>
-          <p:cNvPr id="24" name="Shape 22"/>
+          <p:cNvPr id="19" name="Shape 17"/>
           <p:cNvSpPr/>
           <p:nvPr/>
         </p:nvSpPr>
@@ -2109,7 +1984,7 @@
       </p:sp>
       <p:sp>
         <p:nvSpPr>
-          <p:cNvPr id="25" name="Text 23"/>
+          <p:cNvPr id="20" name="Text 18"/>
           <p:cNvSpPr/>
           <p:nvPr/>
         </p:nvSpPr>
@@ -2490,28 +2365,42 @@
       </p:sp>
       <p:sp>
         <p:nvSpPr>
-          <p:cNvPr id="9" name="Shape 7"/>
-          <p:cNvSpPr/>
-          <p:nvPr/>
-        </p:nvSpPr>
-        <p:spPr>
-          <a:xfrm>
-            <a:off x="502920" y="1805940"/>
-            <a:ext cx="80467" cy="80467"/>
-          </a:xfrm>
-          <a:prstGeom prst="rect">
-            <a:avLst/>
-          </a:prstGeom>
-          <a:solidFill>
-            <a:srgbClr val="1F3864"/>
-          </a:solidFill>
-          <a:ln w="12700">
-            <a:solidFill>
-              <a:srgbClr val="1F3864"/>
-            </a:solidFill>
-            <a:prstDash val="solid"/>
-          </a:ln>
-        </p:spPr>
+          <p:cNvPr id="9" name="Text 7"/>
+          <p:cNvSpPr/>
+          <p:nvPr/>
+        </p:nvSpPr>
+        <p:spPr>
+          <a:xfrm>
+            <a:off x="502920" y="1728216"/>
+            <a:ext cx="5349240" cy="237744"/>
+          </a:xfrm>
+          <a:prstGeom prst="rect">
+            <a:avLst/>
+          </a:prstGeom>
+          <a:noFill/>
+          <a:ln/>
+        </p:spPr>
+        <p:txBody>
+          <a:bodyPr wrap="square" lIns="0" tIns="0" rIns="0" bIns="0" rtlCol="0" anchor="ctr"/>
+          <a:lstStyle/>
+          <a:p>
+            <a:pPr indent="0" marL="0">
+              <a:buNone/>
+            </a:pPr>
+            <a:r>
+              <a:rPr lang="en-US" sz="1250" b="1" dirty="0">
+                <a:solidFill>
+                  <a:srgbClr val="1F3864"/>
+                </a:solidFill>
+                <a:latin typeface="맑은 고딕" pitchFamily="34" charset="0"/>
+                <a:ea typeface="맑은 고딕" pitchFamily="34" charset="-122"/>
+                <a:cs typeface="맑은 고딕" pitchFamily="34" charset="-120"/>
+              </a:rPr>
+              <a:t>Agentic AI의 시장 주류 진입 (2026)</a:t>
+            </a:r>
+            <a:endParaRPr lang="en-US" sz="1250" dirty="0"/>
+          </a:p>
+        </p:txBody>
       </p:sp>
       <p:sp>
         <p:nvSpPr>
@@ -2521,47 +2410,8 @@
         </p:nvSpPr>
         <p:spPr>
           <a:xfrm>
-            <a:off x="658368" y="1728216"/>
-            <a:ext cx="5193792" cy="237744"/>
-          </a:xfrm>
-          <a:prstGeom prst="rect">
-            <a:avLst/>
-          </a:prstGeom>
-          <a:noFill/>
-          <a:ln/>
-        </p:spPr>
-        <p:txBody>
-          <a:bodyPr wrap="square" lIns="0" tIns="0" rIns="0" bIns="0" rtlCol="0" anchor="ctr"/>
-          <a:lstStyle/>
-          <a:p>
-            <a:pPr indent="0" marL="0">
-              <a:buNone/>
-            </a:pPr>
-            <a:r>
-              <a:rPr lang="en-US" sz="1250" b="1" dirty="0">
-                <a:solidFill>
-                  <a:srgbClr val="1F3864"/>
-                </a:solidFill>
-                <a:latin typeface="맑은 고딕" pitchFamily="34" charset="0"/>
-                <a:ea typeface="맑은 고딕" pitchFamily="34" charset="-122"/>
-                <a:cs typeface="맑은 고딕" pitchFamily="34" charset="-120"/>
-              </a:rPr>
-              <a:t>Agentic AI의 시장 주류 진입 (2026)</a:t>
-            </a:r>
-            <a:endParaRPr lang="en-US" sz="1250" dirty="0"/>
-          </a:p>
-        </p:txBody>
-      </p:sp>
-      <p:sp>
-        <p:nvSpPr>
-          <p:cNvPr id="11" name="Text 9"/>
-          <p:cNvSpPr/>
-          <p:nvPr/>
-        </p:nvSpPr>
-        <p:spPr>
-          <a:xfrm>
-            <a:off x="658368" y="2002536"/>
-            <a:ext cx="5193792" cy="914400"/>
+            <a:off x="502920" y="2002536"/>
+            <a:ext cx="5349240" cy="914400"/>
           </a:xfrm>
           <a:prstGeom prst="rect">
             <a:avLst/>
@@ -2672,39 +2522,14 @@
       </p:sp>
       <p:sp>
         <p:nvSpPr>
-          <p:cNvPr id="12" name="Shape 10"/>
-          <p:cNvSpPr/>
-          <p:nvPr/>
-        </p:nvSpPr>
-        <p:spPr>
-          <a:xfrm>
-            <a:off x="502920" y="3342132"/>
-            <a:ext cx="80467" cy="80467"/>
-          </a:xfrm>
-          <a:prstGeom prst="rect">
-            <a:avLst/>
-          </a:prstGeom>
-          <a:solidFill>
-            <a:srgbClr val="1F3864"/>
-          </a:solidFill>
-          <a:ln w="12700">
-            <a:solidFill>
-              <a:srgbClr val="1F3864"/>
-            </a:solidFill>
-            <a:prstDash val="solid"/>
-          </a:ln>
-        </p:spPr>
-      </p:sp>
-      <p:sp>
-        <p:nvSpPr>
-          <p:cNvPr id="13" name="Text 11"/>
-          <p:cNvSpPr/>
-          <p:nvPr/>
-        </p:nvSpPr>
-        <p:spPr>
-          <a:xfrm>
-            <a:off x="658368" y="3264408"/>
-            <a:ext cx="5193792" cy="237744"/>
+          <p:cNvPr id="11" name="Text 9"/>
+          <p:cNvSpPr/>
+          <p:nvPr/>
+        </p:nvSpPr>
+        <p:spPr>
+          <a:xfrm>
+            <a:off x="502920" y="3264408"/>
+            <a:ext cx="5349240" cy="237744"/>
           </a:xfrm>
           <a:prstGeom prst="rect">
             <a:avLst/>
@@ -2736,14 +2561,14 @@
       </p:sp>
       <p:sp>
         <p:nvSpPr>
-          <p:cNvPr id="14" name="Text 12"/>
-          <p:cNvSpPr/>
-          <p:nvPr/>
-        </p:nvSpPr>
-        <p:spPr>
-          <a:xfrm>
-            <a:off x="658368" y="3538728"/>
-            <a:ext cx="5193792" cy="868680"/>
+          <p:cNvPr id="12" name="Text 10"/>
+          <p:cNvSpPr/>
+          <p:nvPr/>
+        </p:nvSpPr>
+        <p:spPr>
+          <a:xfrm>
+            <a:off x="502920" y="3538728"/>
+            <a:ext cx="5349240" cy="868680"/>
           </a:xfrm>
           <a:prstGeom prst="rect">
             <a:avLst/>
@@ -2830,39 +2655,14 @@
       </p:sp>
       <p:sp>
         <p:nvSpPr>
-          <p:cNvPr id="15" name="Shape 13"/>
-          <p:cNvSpPr/>
-          <p:nvPr/>
-        </p:nvSpPr>
-        <p:spPr>
-          <a:xfrm>
-            <a:off x="6428232" y="1805940"/>
-            <a:ext cx="80467" cy="80467"/>
-          </a:xfrm>
-          <a:prstGeom prst="rect">
-            <a:avLst/>
-          </a:prstGeom>
-          <a:solidFill>
-            <a:srgbClr val="1F3864"/>
-          </a:solidFill>
-          <a:ln w="12700">
-            <a:solidFill>
-              <a:srgbClr val="1F3864"/>
-            </a:solidFill>
-            <a:prstDash val="solid"/>
-          </a:ln>
-        </p:spPr>
-      </p:sp>
-      <p:sp>
-        <p:nvSpPr>
-          <p:cNvPr id="16" name="Text 14"/>
-          <p:cNvSpPr/>
-          <p:nvPr/>
-        </p:nvSpPr>
-        <p:spPr>
-          <a:xfrm>
-            <a:off x="6583680" y="1728216"/>
-            <a:ext cx="5193792" cy="237744"/>
+          <p:cNvPr id="13" name="Text 11"/>
+          <p:cNvSpPr/>
+          <p:nvPr/>
+        </p:nvSpPr>
+        <p:spPr>
+          <a:xfrm>
+            <a:off x="6428232" y="1728216"/>
+            <a:ext cx="5349240" cy="237744"/>
           </a:xfrm>
           <a:prstGeom prst="rect">
             <a:avLst/>
@@ -2894,14 +2694,14 @@
       </p:sp>
       <p:sp>
         <p:nvSpPr>
-          <p:cNvPr id="17" name="Text 15"/>
-          <p:cNvSpPr/>
-          <p:nvPr/>
-        </p:nvSpPr>
-        <p:spPr>
-          <a:xfrm>
-            <a:off x="6583680" y="2002536"/>
-            <a:ext cx="5193792" cy="868680"/>
+          <p:cNvPr id="14" name="Text 12"/>
+          <p:cNvSpPr/>
+          <p:nvPr/>
+        </p:nvSpPr>
+        <p:spPr>
+          <a:xfrm>
+            <a:off x="6428232" y="2002536"/>
+            <a:ext cx="5349240" cy="868680"/>
           </a:xfrm>
           <a:prstGeom prst="rect">
             <a:avLst/>
@@ -2988,39 +2788,14 @@
       </p:sp>
       <p:sp>
         <p:nvSpPr>
-          <p:cNvPr id="18" name="Shape 16"/>
-          <p:cNvSpPr/>
-          <p:nvPr/>
-        </p:nvSpPr>
-        <p:spPr>
-          <a:xfrm>
-            <a:off x="6428232" y="3204972"/>
-            <a:ext cx="80467" cy="80467"/>
-          </a:xfrm>
-          <a:prstGeom prst="rect">
-            <a:avLst/>
-          </a:prstGeom>
-          <a:solidFill>
-            <a:srgbClr val="1F3864"/>
-          </a:solidFill>
-          <a:ln w="12700">
-            <a:solidFill>
-              <a:srgbClr val="1F3864"/>
-            </a:solidFill>
-            <a:prstDash val="solid"/>
-          </a:ln>
-        </p:spPr>
-      </p:sp>
-      <p:sp>
-        <p:nvSpPr>
-          <p:cNvPr id="19" name="Text 17"/>
-          <p:cNvSpPr/>
-          <p:nvPr/>
-        </p:nvSpPr>
-        <p:spPr>
-          <a:xfrm>
-            <a:off x="6583680" y="3127248"/>
-            <a:ext cx="5193792" cy="237744"/>
+          <p:cNvPr id="15" name="Text 13"/>
+          <p:cNvSpPr/>
+          <p:nvPr/>
+        </p:nvSpPr>
+        <p:spPr>
+          <a:xfrm>
+            <a:off x="6428232" y="3127248"/>
+            <a:ext cx="5349240" cy="237744"/>
           </a:xfrm>
           <a:prstGeom prst="rect">
             <a:avLst/>
@@ -3052,14 +2827,14 @@
       </p:sp>
       <p:sp>
         <p:nvSpPr>
-          <p:cNvPr id="20" name="Text 18"/>
-          <p:cNvSpPr/>
-          <p:nvPr/>
-        </p:nvSpPr>
-        <p:spPr>
-          <a:xfrm>
-            <a:off x="6583680" y="3401568"/>
-            <a:ext cx="5193792" cy="713232"/>
+          <p:cNvPr id="16" name="Text 14"/>
+          <p:cNvSpPr/>
+          <p:nvPr/>
+        </p:nvSpPr>
+        <p:spPr>
+          <a:xfrm>
+            <a:off x="6428232" y="3401568"/>
+            <a:ext cx="5349240" cy="713232"/>
           </a:xfrm>
           <a:prstGeom prst="rect">
             <a:avLst/>
@@ -3122,39 +2897,14 @@
       </p:sp>
       <p:sp>
         <p:nvSpPr>
-          <p:cNvPr id="21" name="Shape 19"/>
-          <p:cNvSpPr/>
-          <p:nvPr/>
-        </p:nvSpPr>
-        <p:spPr>
-          <a:xfrm>
-            <a:off x="6428232" y="4439412"/>
-            <a:ext cx="80467" cy="80467"/>
-          </a:xfrm>
-          <a:prstGeom prst="rect">
-            <a:avLst/>
-          </a:prstGeom>
-          <a:solidFill>
-            <a:srgbClr val="1F3864"/>
-          </a:solidFill>
-          <a:ln w="12700">
-            <a:solidFill>
-              <a:srgbClr val="1F3864"/>
-            </a:solidFill>
-            <a:prstDash val="solid"/>
-          </a:ln>
-        </p:spPr>
-      </p:sp>
-      <p:sp>
-        <p:nvSpPr>
-          <p:cNvPr id="22" name="Text 20"/>
-          <p:cNvSpPr/>
-          <p:nvPr/>
-        </p:nvSpPr>
-        <p:spPr>
-          <a:xfrm>
-            <a:off x="6583680" y="4361688"/>
-            <a:ext cx="5193792" cy="237744"/>
+          <p:cNvPr id="17" name="Text 15"/>
+          <p:cNvSpPr/>
+          <p:nvPr/>
+        </p:nvSpPr>
+        <p:spPr>
+          <a:xfrm>
+            <a:off x="6428232" y="4361688"/>
+            <a:ext cx="5349240" cy="237744"/>
           </a:xfrm>
           <a:prstGeom prst="rect">
             <a:avLst/>
@@ -3186,14 +2936,14 @@
       </p:sp>
       <p:sp>
         <p:nvSpPr>
-          <p:cNvPr id="23" name="Text 21"/>
-          <p:cNvSpPr/>
-          <p:nvPr/>
-        </p:nvSpPr>
-        <p:spPr>
-          <a:xfrm>
-            <a:off x="6583680" y="4636008"/>
-            <a:ext cx="5193792" cy="713232"/>
+          <p:cNvPr id="18" name="Text 16"/>
+          <p:cNvSpPr/>
+          <p:nvPr/>
+        </p:nvSpPr>
+        <p:spPr>
+          <a:xfrm>
+            <a:off x="6428232" y="4636008"/>
+            <a:ext cx="5349240" cy="713232"/>
           </a:xfrm>
           <a:prstGeom prst="rect">
             <a:avLst/>
@@ -3256,7 +3006,7 @@
       </p:sp>
       <p:sp>
         <p:nvSpPr>
-          <p:cNvPr id="24" name="Shape 22"/>
+          <p:cNvPr id="19" name="Shape 17"/>
           <p:cNvSpPr/>
           <p:nvPr/>
         </p:nvSpPr>
@@ -3281,7 +3031,7 @@
       </p:sp>
       <p:sp>
         <p:nvSpPr>
-          <p:cNvPr id="25" name="Text 23"/>
+          <p:cNvPr id="20" name="Text 18"/>
           <p:cNvSpPr/>
           <p:nvPr/>
         </p:nvSpPr>
@@ -3623,28 +3373,42 @@
       </p:sp>
       <p:sp>
         <p:nvSpPr>
-          <p:cNvPr id="8" name="Shape 6"/>
-          <p:cNvSpPr/>
-          <p:nvPr/>
-        </p:nvSpPr>
-        <p:spPr>
-          <a:xfrm>
-            <a:off x="502920" y="1805940"/>
-            <a:ext cx="80467" cy="80467"/>
-          </a:xfrm>
-          <a:prstGeom prst="rect">
-            <a:avLst/>
-          </a:prstGeom>
-          <a:solidFill>
-            <a:srgbClr val="1F3864"/>
-          </a:solidFill>
-          <a:ln w="12700">
-            <a:solidFill>
-              <a:srgbClr val="1F3864"/>
-            </a:solidFill>
-            <a:prstDash val="solid"/>
-          </a:ln>
-        </p:spPr>
+          <p:cNvPr id="8" name="Text 6"/>
+          <p:cNvSpPr/>
+          <p:nvPr/>
+        </p:nvSpPr>
+        <p:spPr>
+          <a:xfrm>
+            <a:off x="502920" y="1728216"/>
+            <a:ext cx="5349240" cy="237744"/>
+          </a:xfrm>
+          <a:prstGeom prst="rect">
+            <a:avLst/>
+          </a:prstGeom>
+          <a:noFill/>
+          <a:ln/>
+        </p:spPr>
+        <p:txBody>
+          <a:bodyPr wrap="square" lIns="0" tIns="0" rIns="0" bIns="0" rtlCol="0" anchor="ctr"/>
+          <a:lstStyle/>
+          <a:p>
+            <a:pPr indent="0" marL="0">
+              <a:buNone/>
+            </a:pPr>
+            <a:r>
+              <a:rPr lang="en-US" sz="1250" b="1" dirty="0">
+                <a:solidFill>
+                  <a:srgbClr val="1F3864"/>
+                </a:solidFill>
+                <a:latin typeface="맑은 고딕" pitchFamily="34" charset="0"/>
+                <a:ea typeface="맑은 고딕" pitchFamily="34" charset="-122"/>
+                <a:cs typeface="맑은 고딕" pitchFamily="34" charset="-120"/>
+              </a:rPr>
+              <a:t>폰 + 가전 통합 생태계</a:t>
+            </a:r>
+            <a:endParaRPr lang="en-US" sz="1250" dirty="0"/>
+          </a:p>
+        </p:txBody>
       </p:sp>
       <p:sp>
         <p:nvSpPr>
@@ -3654,47 +3418,8 @@
         </p:nvSpPr>
         <p:spPr>
           <a:xfrm>
-            <a:off x="658368" y="1728216"/>
-            <a:ext cx="5193792" cy="237744"/>
-          </a:xfrm>
-          <a:prstGeom prst="rect">
-            <a:avLst/>
-          </a:prstGeom>
-          <a:noFill/>
-          <a:ln/>
-        </p:spPr>
-        <p:txBody>
-          <a:bodyPr wrap="square" lIns="0" tIns="0" rIns="0" bIns="0" rtlCol="0" anchor="ctr"/>
-          <a:lstStyle/>
-          <a:p>
-            <a:pPr indent="0" marL="0">
-              <a:buNone/>
-            </a:pPr>
-            <a:r>
-              <a:rPr lang="en-US" sz="1250" b="1" dirty="0">
-                <a:solidFill>
-                  <a:srgbClr val="1F3864"/>
-                </a:solidFill>
-                <a:latin typeface="맑은 고딕" pitchFamily="34" charset="0"/>
-                <a:ea typeface="맑은 고딕" pitchFamily="34" charset="-122"/>
-                <a:cs typeface="맑은 고딕" pitchFamily="34" charset="-120"/>
-              </a:rPr>
-              <a:t>폰 + 가전 통합 생태계</a:t>
-            </a:r>
-            <a:endParaRPr lang="en-US" sz="1250" dirty="0"/>
-          </a:p>
-        </p:txBody>
-      </p:sp>
-      <p:sp>
-        <p:nvSpPr>
-          <p:cNvPr id="10" name="Text 8"/>
-          <p:cNvSpPr/>
-          <p:nvPr/>
-        </p:nvSpPr>
-        <p:spPr>
-          <a:xfrm>
-            <a:off x="658368" y="2002536"/>
-            <a:ext cx="5193792" cy="713232"/>
+            <a:off x="502920" y="2002536"/>
+            <a:ext cx="5349240" cy="713232"/>
           </a:xfrm>
           <a:prstGeom prst="rect">
             <a:avLst/>
@@ -3757,39 +3482,14 @@
       </p:sp>
       <p:sp>
         <p:nvSpPr>
-          <p:cNvPr id="11" name="Shape 9"/>
-          <p:cNvSpPr/>
-          <p:nvPr/>
-        </p:nvSpPr>
-        <p:spPr>
-          <a:xfrm>
-            <a:off x="502920" y="3086100"/>
-            <a:ext cx="80467" cy="80467"/>
-          </a:xfrm>
-          <a:prstGeom prst="rect">
-            <a:avLst/>
-          </a:prstGeom>
-          <a:solidFill>
-            <a:srgbClr val="1F3864"/>
-          </a:solidFill>
-          <a:ln w="12700">
-            <a:solidFill>
-              <a:srgbClr val="1F3864"/>
-            </a:solidFill>
-            <a:prstDash val="solid"/>
-          </a:ln>
-        </p:spPr>
-      </p:sp>
-      <p:sp>
-        <p:nvSpPr>
-          <p:cNvPr id="12" name="Text 10"/>
-          <p:cNvSpPr/>
-          <p:nvPr/>
-        </p:nvSpPr>
-        <p:spPr>
-          <a:xfrm>
-            <a:off x="658368" y="3008376"/>
-            <a:ext cx="5193792" cy="237744"/>
+          <p:cNvPr id="10" name="Text 8"/>
+          <p:cNvSpPr/>
+          <p:nvPr/>
+        </p:nvSpPr>
+        <p:spPr>
+          <a:xfrm>
+            <a:off x="502920" y="3008376"/>
+            <a:ext cx="5349240" cy="237744"/>
           </a:xfrm>
           <a:prstGeom prst="rect">
             <a:avLst/>
@@ -3821,14 +3521,14 @@
       </p:sp>
       <p:sp>
         <p:nvSpPr>
-          <p:cNvPr id="13" name="Text 11"/>
-          <p:cNvSpPr/>
-          <p:nvPr/>
-        </p:nvSpPr>
-        <p:spPr>
-          <a:xfrm>
-            <a:off x="658368" y="3282696"/>
-            <a:ext cx="5193792" cy="713232"/>
+          <p:cNvPr id="11" name="Text 9"/>
+          <p:cNvSpPr/>
+          <p:nvPr/>
+        </p:nvSpPr>
+        <p:spPr>
+          <a:xfrm>
+            <a:off x="502920" y="3282696"/>
+            <a:ext cx="5349240" cy="713232"/>
           </a:xfrm>
           <a:prstGeom prst="rect">
             <a:avLst/>
@@ -3891,39 +3591,14 @@
       </p:sp>
       <p:sp>
         <p:nvSpPr>
-          <p:cNvPr id="14" name="Shape 12"/>
-          <p:cNvSpPr/>
-          <p:nvPr/>
-        </p:nvSpPr>
-        <p:spPr>
-          <a:xfrm>
-            <a:off x="502920" y="4366260"/>
-            <a:ext cx="80467" cy="80467"/>
-          </a:xfrm>
-          <a:prstGeom prst="rect">
-            <a:avLst/>
-          </a:prstGeom>
-          <a:solidFill>
-            <a:srgbClr val="1F3864"/>
-          </a:solidFill>
-          <a:ln w="12700">
-            <a:solidFill>
-              <a:srgbClr val="1F3864"/>
-            </a:solidFill>
-            <a:prstDash val="solid"/>
-          </a:ln>
-        </p:spPr>
-      </p:sp>
-      <p:sp>
-        <p:nvSpPr>
-          <p:cNvPr id="15" name="Text 13"/>
-          <p:cNvSpPr/>
-          <p:nvPr/>
-        </p:nvSpPr>
-        <p:spPr>
-          <a:xfrm>
-            <a:off x="658368" y="4288536"/>
-            <a:ext cx="5193792" cy="237744"/>
+          <p:cNvPr id="12" name="Text 10"/>
+          <p:cNvSpPr/>
+          <p:nvPr/>
+        </p:nvSpPr>
+        <p:spPr>
+          <a:xfrm>
+            <a:off x="502920" y="4288536"/>
+            <a:ext cx="5349240" cy="237744"/>
           </a:xfrm>
           <a:prstGeom prst="rect">
             <a:avLst/>
@@ -3955,14 +3630,14 @@
       </p:sp>
       <p:sp>
         <p:nvSpPr>
-          <p:cNvPr id="16" name="Text 14"/>
-          <p:cNvSpPr/>
-          <p:nvPr/>
-        </p:nvSpPr>
-        <p:spPr>
-          <a:xfrm>
-            <a:off x="658368" y="4562856"/>
-            <a:ext cx="5193792" cy="713232"/>
+          <p:cNvPr id="13" name="Text 11"/>
+          <p:cNvSpPr/>
+          <p:nvPr/>
+        </p:nvSpPr>
+        <p:spPr>
+          <a:xfrm>
+            <a:off x="502920" y="4562856"/>
+            <a:ext cx="5349240" cy="713232"/>
           </a:xfrm>
           <a:prstGeom prst="rect">
             <a:avLst/>
@@ -4025,39 +3700,14 @@
       </p:sp>
       <p:sp>
         <p:nvSpPr>
-          <p:cNvPr id="17" name="Shape 15"/>
-          <p:cNvSpPr/>
-          <p:nvPr/>
-        </p:nvSpPr>
-        <p:spPr>
-          <a:xfrm>
-            <a:off x="6428232" y="1805940"/>
-            <a:ext cx="80467" cy="80467"/>
-          </a:xfrm>
-          <a:prstGeom prst="rect">
-            <a:avLst/>
-          </a:prstGeom>
-          <a:solidFill>
-            <a:srgbClr val="1F3864"/>
-          </a:solidFill>
-          <a:ln w="12700">
-            <a:solidFill>
-              <a:srgbClr val="1F3864"/>
-            </a:solidFill>
-            <a:prstDash val="solid"/>
-          </a:ln>
-        </p:spPr>
-      </p:sp>
-      <p:sp>
-        <p:nvSpPr>
-          <p:cNvPr id="18" name="Text 16"/>
-          <p:cNvSpPr/>
-          <p:nvPr/>
-        </p:nvSpPr>
-        <p:spPr>
-          <a:xfrm>
-            <a:off x="6583680" y="1728216"/>
-            <a:ext cx="5193792" cy="237744"/>
+          <p:cNvPr id="14" name="Text 12"/>
+          <p:cNvSpPr/>
+          <p:nvPr/>
+        </p:nvSpPr>
+        <p:spPr>
+          <a:xfrm>
+            <a:off x="6428232" y="1728216"/>
+            <a:ext cx="5349240" cy="237744"/>
           </a:xfrm>
           <a:prstGeom prst="rect">
             <a:avLst/>
@@ -4089,7 +3739,7 @@
       </p:sp>
       <p:sp>
         <p:nvSpPr>
-          <p:cNvPr id="19" name="Shape 17"/>
+          <p:cNvPr id="15" name="Shape 13"/>
           <p:cNvSpPr/>
           <p:nvPr/>
         </p:nvSpPr>
@@ -4114,7 +3764,7 @@
       </p:sp>
       <p:sp>
         <p:nvSpPr>
-          <p:cNvPr id="20" name="Text 18"/>
+          <p:cNvPr id="16" name="Text 14"/>
           <p:cNvSpPr/>
           <p:nvPr/>
         </p:nvSpPr>
@@ -4193,7 +3843,7 @@
       </p:sp>
       <p:sp>
         <p:nvSpPr>
-          <p:cNvPr id="21" name="Text 19"/>
+          <p:cNvPr id="17" name="Text 15"/>
           <p:cNvSpPr/>
           <p:nvPr/>
         </p:nvSpPr>
@@ -4235,39 +3885,14 @@
       </p:sp>
       <p:sp>
         <p:nvSpPr>
-          <p:cNvPr id="22" name="Shape 20"/>
-          <p:cNvSpPr/>
-          <p:nvPr/>
-        </p:nvSpPr>
-        <p:spPr>
-          <a:xfrm>
-            <a:off x="6428232" y="3323844"/>
-            <a:ext cx="80467" cy="80467"/>
-          </a:xfrm>
-          <a:prstGeom prst="rect">
-            <a:avLst/>
-          </a:prstGeom>
-          <a:solidFill>
-            <a:srgbClr val="1F3864"/>
-          </a:solidFill>
-          <a:ln w="12700">
-            <a:solidFill>
-              <a:srgbClr val="1F3864"/>
-            </a:solidFill>
-            <a:prstDash val="solid"/>
-          </a:ln>
-        </p:spPr>
-      </p:sp>
-      <p:sp>
-        <p:nvSpPr>
-          <p:cNvPr id="23" name="Text 21"/>
-          <p:cNvSpPr/>
-          <p:nvPr/>
-        </p:nvSpPr>
-        <p:spPr>
-          <a:xfrm>
-            <a:off x="6583680" y="3246120"/>
-            <a:ext cx="5193792" cy="237744"/>
+          <p:cNvPr id="18" name="Text 16"/>
+          <p:cNvSpPr/>
+          <p:nvPr/>
+        </p:nvSpPr>
+        <p:spPr>
+          <a:xfrm>
+            <a:off x="6428232" y="3246120"/>
+            <a:ext cx="5349240" cy="237744"/>
           </a:xfrm>
           <a:prstGeom prst="rect">
             <a:avLst/>
@@ -4299,7 +3924,7 @@
       </p:sp>
       <p:sp>
         <p:nvSpPr>
-          <p:cNvPr id="24" name="Shape 22"/>
+          <p:cNvPr id="19" name="Shape 17"/>
           <p:cNvSpPr/>
           <p:nvPr/>
         </p:nvSpPr>
@@ -4324,7 +3949,7 @@
       </p:sp>
       <p:sp>
         <p:nvSpPr>
-          <p:cNvPr id="25" name="Text 23"/>
+          <p:cNvPr id="20" name="Text 18"/>
           <p:cNvSpPr/>
           <p:nvPr/>
         </p:nvSpPr>
@@ -4386,39 +4011,14 @@
       </p:sp>
       <p:sp>
         <p:nvSpPr>
-          <p:cNvPr id="26" name="Shape 24"/>
-          <p:cNvSpPr/>
-          <p:nvPr/>
-        </p:nvSpPr>
-        <p:spPr>
-          <a:xfrm>
-            <a:off x="6428232" y="4640580"/>
-            <a:ext cx="80467" cy="80467"/>
-          </a:xfrm>
-          <a:prstGeom prst="rect">
-            <a:avLst/>
-          </a:prstGeom>
-          <a:solidFill>
-            <a:srgbClr val="1F3864"/>
-          </a:solidFill>
-          <a:ln w="12700">
-            <a:solidFill>
-              <a:srgbClr val="1F3864"/>
-            </a:solidFill>
-            <a:prstDash val="solid"/>
-          </a:ln>
-        </p:spPr>
-      </p:sp>
-      <p:sp>
-        <p:nvSpPr>
-          <p:cNvPr id="27" name="Text 25"/>
-          <p:cNvSpPr/>
-          <p:nvPr/>
-        </p:nvSpPr>
-        <p:spPr>
-          <a:xfrm>
-            <a:off x="6583680" y="4562856"/>
-            <a:ext cx="5193792" cy="237744"/>
+          <p:cNvPr id="21" name="Text 19"/>
+          <p:cNvSpPr/>
+          <p:nvPr/>
+        </p:nvSpPr>
+        <p:spPr>
+          <a:xfrm>
+            <a:off x="6428232" y="4562856"/>
+            <a:ext cx="5349240" cy="237744"/>
           </a:xfrm>
           <a:prstGeom prst="rect">
             <a:avLst/>
@@ -4450,14 +4050,14 @@
       </p:sp>
       <p:sp>
         <p:nvSpPr>
-          <p:cNvPr id="28" name="Text 26"/>
-          <p:cNvSpPr/>
-          <p:nvPr/>
-        </p:nvSpPr>
-        <p:spPr>
-          <a:xfrm>
-            <a:off x="6583680" y="4937760"/>
-            <a:ext cx="5193792" cy="219456"/>
+          <p:cNvPr id="22" name="Text 20"/>
+          <p:cNvSpPr/>
+          <p:nvPr/>
+        </p:nvSpPr>
+        <p:spPr>
+          <a:xfrm>
+            <a:off x="6428232" y="4937760"/>
+            <a:ext cx="5349240" cy="219456"/>
           </a:xfrm>
           <a:prstGeom prst="rect">
             <a:avLst/>
@@ -4489,14 +4089,14 @@
       </p:sp>
       <p:sp>
         <p:nvSpPr>
-          <p:cNvPr id="29" name="Text 27"/>
-          <p:cNvSpPr/>
-          <p:nvPr/>
-        </p:nvSpPr>
-        <p:spPr>
-          <a:xfrm>
-            <a:off x="6583680" y="5157216"/>
-            <a:ext cx="5193792" cy="457200"/>
+          <p:cNvPr id="23" name="Text 21"/>
+          <p:cNvSpPr/>
+          <p:nvPr/>
+        </p:nvSpPr>
+        <p:spPr>
+          <a:xfrm>
+            <a:off x="6428232" y="5157216"/>
+            <a:ext cx="5349240" cy="457200"/>
           </a:xfrm>
           <a:prstGeom prst="rect">
             <a:avLst/>
@@ -4553,14 +4153,14 @@
       </p:sp>
       <p:sp>
         <p:nvSpPr>
-          <p:cNvPr id="30" name="Text 28"/>
-          <p:cNvSpPr/>
-          <p:nvPr/>
-        </p:nvSpPr>
-        <p:spPr>
-          <a:xfrm>
-            <a:off x="6583680" y="5724144"/>
-            <a:ext cx="5193792" cy="219456"/>
+          <p:cNvPr id="24" name="Text 22"/>
+          <p:cNvSpPr/>
+          <p:nvPr/>
+        </p:nvSpPr>
+        <p:spPr>
+          <a:xfrm>
+            <a:off x="6428232" y="5724144"/>
+            <a:ext cx="5349240" cy="219456"/>
           </a:xfrm>
           <a:prstGeom prst="rect">
             <a:avLst/>
@@ -4592,14 +4192,14 @@
       </p:sp>
       <p:sp>
         <p:nvSpPr>
-          <p:cNvPr id="31" name="Text 29"/>
-          <p:cNvSpPr/>
-          <p:nvPr/>
-        </p:nvSpPr>
-        <p:spPr>
-          <a:xfrm>
-            <a:off x="6583680" y="5943600"/>
-            <a:ext cx="5193792" cy="457200"/>
+          <p:cNvPr id="25" name="Text 23"/>
+          <p:cNvSpPr/>
+          <p:nvPr/>
+        </p:nvSpPr>
+        <p:spPr>
+          <a:xfrm>
+            <a:off x="6428232" y="5943600"/>
+            <a:ext cx="5349240" cy="457200"/>
           </a:xfrm>
           <a:prstGeom prst="rect">
             <a:avLst/>
